--- a/presentation/foundation.pptx
+++ b/presentation/foundation.pptx
@@ -5,6 +5,7 @@
     <p:sldMasterId id="2147483648" r:id="rId1"/>
   </p:sldMasterIdLst>
   <p:sldIdLst>
+    <p:sldId id="262" r:id="rId14"/>
     <p:sldId id="256" r:id="rId7"/>
     <p:sldId id="257" r:id="rId9"/>
     <p:sldId id="258" r:id="rId10"/>
@@ -888,6 +889,76 @@
           <a:p>
             <a:r>
               <a:t>Dependency and trust are major mechanisms, under favorable missionary and political settings. This is a stochastic operational threshold, not proof of a mathematical phase transition. The boundary replay crosses late and fluctuates: only 26 of 1001 observed states are widespread. Terminal outcomes do not prove lasting control. End with the takeaway. Future work should use fresh validation seeds at 14 and 18 traders and record persistence for every run. Invite questions.</a:t>
+            </a:r>
+          </a:p>
+        </p:txBody>
+      </p:sp>
+      <p:sp>
+        <p:nvSpPr>
+          <p:cNvPr id="4" name="Slide Number Placeholder 3"/>
+          <p:cNvSpPr>
+            <a:spLocks noGrp="1"/>
+          </p:cNvSpPr>
+          <p:nvPr>
+            <p:ph type="sldNum" idx="5" sz="quarter"/>
+          </p:nvPr>
+        </p:nvSpPr>
+        <p:spPr/>
+      </p:sp>
+    </p:spTree>
+  </p:cSld>
+  <p:clrMapOvr>
+    <a:masterClrMapping/>
+  </p:clrMapOvr>
+</p:notes>
+</file>
+
+<file path=ppt/notesSlides/notesSlide7.xml><?xml version="1.0" encoding="utf-8"?>
+<p:notes xmlns:a="http://schemas.openxmlformats.org/drawingml/2006/main" xmlns:p="http://schemas.openxmlformats.org/presentationml/2006/main" xmlns:r="http://schemas.openxmlformats.org/officeDocument/2006/relationships">
+  <p:cSld>
+    <p:spTree>
+      <p:nvGrpSpPr>
+        <p:cNvPr id="1" name=""/>
+        <p:cNvGrpSpPr/>
+        <p:nvPr/>
+      </p:nvGrpSpPr>
+      <p:grpSpPr>
+        <a:xfrm>
+          <a:off x="0" y="0"/>
+          <a:ext cx="0" cy="0"/>
+          <a:chOff x="0" y="0"/>
+          <a:chExt cx="0" cy="0"/>
+        </a:xfrm>
+      </p:grpSpPr>
+      <p:sp>
+        <p:nvSpPr>
+          <p:cNvPr id="2" name="Slide Image Placeholder 1"/>
+          <p:cNvSpPr>
+            <a:spLocks noGrp="1"/>
+          </p:cNvSpPr>
+          <p:nvPr>
+            <p:ph type="sldImg" idx="2"/>
+          </p:nvPr>
+        </p:nvSpPr>
+        <p:spPr/>
+      </p:sp>
+      <p:sp>
+        <p:nvSpPr>
+          <p:cNvPr id="3" name="Notes Placeholder 2"/>
+          <p:cNvSpPr>
+            <a:spLocks noGrp="1"/>
+          </p:cNvSpPr>
+          <p:nvPr>
+            <p:ph type="body" idx="3" sz="quarter"/>
+          </p:nvPr>
+        </p:nvSpPr>
+        <p:spPr/>
+        <p:txBody>
+          <a:bodyPr/>
+          <a:lstStyle/>
+          <a:p>
+            <a:r>
+              <a:t>Foundation: influence through economic dependency. Adam Gerencser / IXFMXW. Introduce the project and advance to the research question before starting the timed talk.</a:t>
             </a:r>
           </a:p>
         </p:txBody>
@@ -4130,6 +4201,48 @@
       <p:pic>
         <p:nvPicPr>
           <p:cNvPr id="2" name="Picture 1" descr="slide-5.png"/>
+          <p:cNvPicPr>
+            <a:picLocks noChangeAspect="1"/>
+          </p:cNvPicPr>
+          <p:nvPr/>
+        </p:nvPicPr>
+        <p:blipFill>
+          <a:blip r:embed="rId2"/>
+          <a:stretch>
+            <a:fillRect/>
+          </a:stretch>
+        </p:blipFill>
+        <p:spPr>
+          <a:xfrm>
+            <a:off x="0" y="0"/>
+            <a:ext cx="12191999" cy="6858000"/>
+          </a:xfrm>
+          <a:prstGeom prst="rect">
+            <a:avLst/>
+          </a:prstGeom>
+        </p:spPr>
+      </p:pic>
+    </p:spTree>
+  </p:cSld>
+  <p:clrMapOvr>
+    <a:masterClrMapping/>
+  </p:clrMapOvr>
+</p:sld>
+</file>
+
+<file path=ppt/slides/slide7.xml><?xml version="1.0" encoding="utf-8"?>
+<p:sld xmlns:a="http://schemas.openxmlformats.org/drawingml/2006/main" xmlns:p="http://schemas.openxmlformats.org/presentationml/2006/main" xmlns:r="http://schemas.openxmlformats.org/officeDocument/2006/relationships">
+  <p:cSld>
+    <p:spTree>
+      <p:nvGrpSpPr>
+        <p:cNvPr id="1" name=""/>
+        <p:cNvGrpSpPr/>
+        <p:nvPr/>
+      </p:nvGrpSpPr>
+      <p:grpSpPr/>
+      <p:pic>
+        <p:nvPicPr>
+          <p:cNvPr id="2" name="Picture 1" descr="image.png"/>
           <p:cNvPicPr>
             <a:picLocks noChangeAspect="1"/>
           </p:cNvPicPr>
